--- a/courses/learn_placement/module01-03-net-models/slides.pptx
+++ b/courses/learn_placement/module01-03-net-models/slides.pptx
@@ -16,6 +16,9 @@
     <p:sldId id="264" r:id="rId16"/>
     <p:sldId id="265" r:id="rId17"/>
     <p:sldId id="266" r:id="rId18"/>
+    <p:sldId id="267" r:id="rId19"/>
+    <p:sldId id="268" r:id="rId20"/>
+    <p:sldId id="269" r:id="rId21"/>
   </p:sldIdLst>
   <p:sldSz cx="12191695" cy="6858000" type="screen4x3"/>
   <p:notesSz cx="6858000" cy="9144000"/>
@@ -582,7 +585,7 @@
           <a:lstStyle/>
           <a:p>
             <a:r>
-              <a:t>Common traps: celebrating HPWL while cells pile into one bin; ignoring fixed pads A and D; mixing bbox and clique models in one report; keeping only the final SA iterate instead of the best; and forgetting that timing weights change the objective, not just the label.</a:t>
+              <a:t>In the browser lab track, open the **net-models** lab from the tools shelf. Load the starter placement, run the algorithm once, and read HPWL—and density when the panel shows it. Work the challenges that lock the goldens, then come back to implement the same loop yourself.</a:t>
             </a:r>
           </a:p>
         </p:txBody>
@@ -652,6 +655,146 @@
           <a:lstStyle/>
           <a:p>
             <a:r>
+              <a:t>In the implement track, open this module's EXAMPLES.md Pseudocode section and the course common solvers. Parse `tiny_place.json`, run the algorithm with a deterministic seed, and print coordinates plus HPWL. Match the browser goldens before you claim the checklist.</a:t>
+            </a:r>
+          </a:p>
+        </p:txBody>
+      </p:sp>
+      <p:sp>
+        <p:nvSpPr>
+          <p:cNvPr id="4" name="Slide Number Placeholder 3"/>
+          <p:cNvSpPr>
+            <a:spLocks noGrp="1"/>
+          </p:cNvSpPr>
+          <p:nvPr>
+            <p:ph type="sldNum" idx="5" sz="quarter"/>
+          </p:nvPr>
+        </p:nvSpPr>
+        <p:spPr/>
+      </p:sp>
+    </p:spTree>
+  </p:cSld>
+  <p:clrMapOvr>
+    <a:masterClrMapping/>
+  </p:clrMapOvr>
+</p:notes>
+</file>
+
+<file path=ppt/notesSlides/notesSlide12.xml><?xml version="1.0" encoding="utf-8"?>
+<p:notes xmlns:a="http://schemas.openxmlformats.org/drawingml/2006/main" xmlns:p="http://schemas.openxmlformats.org/presentationml/2006/main" xmlns:r="http://schemas.openxmlformats.org/officeDocument/2006/relationships">
+  <p:cSld>
+    <p:spTree>
+      <p:nvGrpSpPr>
+        <p:cNvPr id="1" name=""/>
+        <p:cNvGrpSpPr/>
+        <p:nvPr/>
+      </p:nvGrpSpPr>
+      <p:grpSpPr>
+        <a:xfrm>
+          <a:off x="0" y="0"/>
+          <a:ext cx="0" cy="0"/>
+          <a:chOff x="0" y="0"/>
+          <a:chExt cx="0" cy="0"/>
+        </a:xfrm>
+      </p:grpSpPr>
+      <p:sp>
+        <p:nvSpPr>
+          <p:cNvPr id="2" name="Slide Image Placeholder 1"/>
+          <p:cNvSpPr>
+            <a:spLocks noGrp="1"/>
+          </p:cNvSpPr>
+          <p:nvPr>
+            <p:ph type="sldImg" idx="2"/>
+          </p:nvPr>
+        </p:nvSpPr>
+        <p:spPr/>
+      </p:sp>
+      <p:sp>
+        <p:nvSpPr>
+          <p:cNvPr id="3" name="Notes Placeholder 2"/>
+          <p:cNvSpPr>
+            <a:spLocks noGrp="1"/>
+          </p:cNvSpPr>
+          <p:nvPr>
+            <p:ph type="body" idx="3" sz="quarter"/>
+          </p:nvPr>
+        </p:nvSpPr>
+        <p:spPr/>
+        <p:txBody>
+          <a:bodyPr/>
+          <a:lstStyle/>
+          <a:p>
+            <a:r>
+              <a:t>Common traps: celebrating HPWL while cells pile into one bin; ignoring fixed pads A and D; mixing bbox and clique models in one report; keeping only the final SA iterate instead of the best; and forgetting that timing weights change the objective, not just the label.</a:t>
+            </a:r>
+          </a:p>
+        </p:txBody>
+      </p:sp>
+      <p:sp>
+        <p:nvSpPr>
+          <p:cNvPr id="4" name="Slide Number Placeholder 3"/>
+          <p:cNvSpPr>
+            <a:spLocks noGrp="1"/>
+          </p:cNvSpPr>
+          <p:nvPr>
+            <p:ph type="sldNum" idx="5" sz="quarter"/>
+          </p:nvPr>
+        </p:nvSpPr>
+        <p:spPr/>
+      </p:sp>
+    </p:spTree>
+  </p:cSld>
+  <p:clrMapOvr>
+    <a:masterClrMapping/>
+  </p:clrMapOvr>
+</p:notes>
+</file>
+
+<file path=ppt/notesSlides/notesSlide13.xml><?xml version="1.0" encoding="utf-8"?>
+<p:notes xmlns:a="http://schemas.openxmlformats.org/drawingml/2006/main" xmlns:p="http://schemas.openxmlformats.org/presentationml/2006/main" xmlns:r="http://schemas.openxmlformats.org/officeDocument/2006/relationships">
+  <p:cSld>
+    <p:spTree>
+      <p:nvGrpSpPr>
+        <p:cNvPr id="1" name=""/>
+        <p:cNvGrpSpPr/>
+        <p:nvPr/>
+      </p:nvGrpSpPr>
+      <p:grpSpPr>
+        <a:xfrm>
+          <a:off x="0" y="0"/>
+          <a:ext cx="0" cy="0"/>
+          <a:chOff x="0" y="0"/>
+          <a:chExt cx="0" cy="0"/>
+        </a:xfrm>
+      </p:grpSpPr>
+      <p:sp>
+        <p:nvSpPr>
+          <p:cNvPr id="2" name="Slide Image Placeholder 1"/>
+          <p:cNvSpPr>
+            <a:spLocks noGrp="1"/>
+          </p:cNvSpPr>
+          <p:nvPr>
+            <p:ph type="sldImg" idx="2"/>
+          </p:nvPr>
+        </p:nvSpPr>
+        <p:spPr/>
+      </p:sp>
+      <p:sp>
+        <p:nvSpPr>
+          <p:cNvPr id="3" name="Notes Placeholder 2"/>
+          <p:cNvSpPr>
+            <a:spLocks noGrp="1"/>
+          </p:cNvSpPr>
+          <p:nvPr>
+            <p:ph type="body" idx="3" sz="quarter"/>
+          </p:nvPr>
+        </p:nvSpPr>
+        <p:spPr/>
+        <p:txBody>
+          <a:bodyPr/>
+          <a:lstStyle/>
+          <a:p>
+            <a:r>
               <a:t>Complete the checklist for at least one track—preferably both. Implement until your metrics match the starter goldens. When you’re ready, take the short quiz, then continue to the next module.</a:t>
             </a:r>
           </a:p>
@@ -725,12 +868,6 @@
               <a:t>Bbox is cheap and standard. Clique overestimates affinity on multi-pin nets. Star depends on the hub choice. Use one model for the reported objective and say which—mixing them in one table is how goldens quietly disagree.</a:t>
             </a:r>
           </a:p>
-          <a:p/>
-          <a:p>
-            <a:r>
-              <a:t>&lt;!-- algorithm-walkthrough --&gt;</a:t>
-            </a:r>
-          </a:p>
         </p:txBody>
       </p:sp>
       <p:sp>
@@ -798,7 +935,13 @@
           <a:lstStyle/>
           <a:p>
             <a:r>
-              <a:t>On the golden four-pin net A–B–C–D, the bounding box is two by two, so bbox HPWL is four. That is the cheap, standard teaching metric.</a:t>
+              <a:t>Net models change which edges enter the sum. Pseudocode names bbox, clique, and star so reports stay comparable.</a:t>
+            </a:r>
+          </a:p>
+          <a:p/>
+          <a:p>
+            <a:r>
+              <a:t>Open this module's examples file and find the Pseudocode section. That written sketch is what you implement on the implement track and what the browser challenges measure.</a:t>
             </a:r>
           </a:p>
         </p:txBody>
@@ -868,7 +1011,7 @@
           <a:lstStyle/>
           <a:p>
             <a:r>
-              <a:t>Clique wirelength adds HPWL of every pairwise edge among the four pins. On golden ABCD that sum is sixteen—four times the bbox number.</a:t>
+              <a:t>On golden ABCD, clique HPWL is sixteen and star from A is eight. Mixing models in one table is a metric bug.</a:t>
             </a:r>
           </a:p>
         </p:txBody>
@@ -938,7 +1081,7 @@
           <a:lstStyle/>
           <a:p>
             <a:r>
-              <a:t>Star sums spokes from a hub to every other pin. With hub A on golden ABCD, star HPWL is eight—between bbox four and clique sixteen.</a:t>
+              <a:t>On the golden four-pin net A–B–C–D, the bounding box is two by two, so bbox HPWL is four. That is the cheap, standard teaching metric.</a:t>
             </a:r>
           </a:p>
         </p:txBody>
@@ -1008,7 +1151,7 @@
           <a:lstStyle/>
           <a:p>
             <a:r>
-              <a:t>Bbox four, star-from-A eight, clique sixteen. Pick one model for the reported objective and say which—mixing models is how goldens quietly disagree.</a:t>
+              <a:t>Clique wirelength adds HPWL of every pairwise edge among the four pins. On golden ABCD that sum is sixteen—four times the bbox number.</a:t>
             </a:r>
           </a:p>
         </p:txBody>
@@ -1078,13 +1221,7 @@
           <a:lstStyle/>
           <a:p>
             <a:r>
-              <a:t>Use one wirelength model in the objective and in the report. The rest of the course quotes bbox HPWL unless a lab explicitly asks for clique or star.</a:t>
-            </a:r>
-          </a:p>
-          <a:p/>
-          <a:p>
-            <a:r>
-              <a:t>&lt;!-- /algorithm-walkthrough --&gt;</a:t>
+              <a:t>Star sums spokes from a hub to every other pin. With hub A on golden ABCD, star HPWL is eight—between bbox four and clique sixteen.</a:t>
             </a:r>
           </a:p>
         </p:txBody>
@@ -1154,7 +1291,7 @@
           <a:lstStyle/>
           <a:p>
             <a:r>
-              <a:t>In the browser lab track, open the **net-models** lab from the tools shelf. Load the starter placement, run the algorithm once, and read HPWL—and density when the panel shows it. Work the challenges that lock the goldens, then come back to implement the same loop yourself.</a:t>
+              <a:t>Bbox four, star-from-A eight, clique sixteen. Pick one model for the reported objective and say which—mixing models is how goldens quietly disagree.</a:t>
             </a:r>
           </a:p>
         </p:txBody>
@@ -1224,7 +1361,7 @@
           <a:lstStyle/>
           <a:p>
             <a:r>
-              <a:t>In the implement track, open this module’s examples and the course `common/` solvers. Parse `tiny_place.json`, run the algorithm with a deterministic seed, and print coordinates plus HPWL. Match the browser goldens before you claim the checklist.</a:t>
+              <a:t>Use one wirelength model in the objective and in the report. The rest of the course quotes bbox HPWL unless a lab explicitly asks for clique or star.</a:t>
             </a:r>
           </a:p>
         </p:txBody>
@@ -4382,21 +4519,45 @@
                 </a:solidFill>
                 <a:latin typeface="Calibri"/>
               </a:rPr>
-              <a:t>Pitfalls</a:t>
-            </a:r>
-          </a:p>
-        </p:txBody>
-      </p:sp>
-      <p:sp>
-        <p:nvSpPr>
-          <p:cNvPr id="3" name="TextBox 2"/>
+              <a:t>Name the model you optimize</a:t>
+            </a:r>
+          </a:p>
+        </p:txBody>
+      </p:sp>
+      <p:pic>
+        <p:nvPicPr>
+          <p:cNvPr id="3" name="Picture 2" descr="05-takeaway.png"/>
+          <p:cNvPicPr>
+            <a:picLocks noChangeAspect="1"/>
+          </p:cNvPicPr>
+          <p:nvPr/>
+        </p:nvPicPr>
+        <p:blipFill>
+          <a:blip r:embed="rId2"/>
+          <a:stretch>
+            <a:fillRect/>
+          </a:stretch>
+        </p:blipFill>
+        <p:spPr>
+          <a:xfrm>
+            <a:off x="548640" y="1143000"/>
+            <a:ext cx="9404113" cy="4572000"/>
+          </a:xfrm>
+          <a:prstGeom prst="rect">
+            <a:avLst/>
+          </a:prstGeom>
+        </p:spPr>
+      </p:pic>
+      <p:sp>
+        <p:nvSpPr>
+          <p:cNvPr id="4" name="TextBox 3"/>
           <p:cNvSpPr txBox="1"/>
           <p:nvPr/>
         </p:nvSpPr>
         <p:spPr>
           <a:xfrm>
-            <a:off x="548640" y="1234440"/>
-            <a:ext cx="11064240" cy="4937760"/>
+            <a:off x="548640" y="5897880"/>
+            <a:ext cx="11064240" cy="411480"/>
           </a:xfrm>
           <a:prstGeom prst="rect">
             <a:avLst/>
@@ -4409,32 +4570,26 @@
           </a:bodyPr>
           <a:lstStyle/>
           <a:p>
-            <a:pPr lvl="0" marL="457200" indent="-228600">
-              <a:buFont typeface="Calibri"/>
-              <a:spcAft>
-                <a:spcPts val="1000"/>
-              </a:spcAft>
-              <a:buSzPct val="100000"/>
-              <a:buChar char="•"/>
+            <a:pPr>
               <a:lnSpc>
                 <a:spcPts val="2200"/>
               </a:lnSpc>
             </a:pPr>
             <a:r>
-              <a:rPr sz="2000" b="0">
+              <a:rPr sz="1200" b="0">
                 <a:solidFill>
                   <a:srgbClr val="333333"/>
                 </a:solidFill>
                 <a:latin typeface="Calibri"/>
               </a:rPr>
-              <a:t>Common traps</a:t>
-            </a:r>
-          </a:p>
-        </p:txBody>
-      </p:sp>
-      <p:sp>
-        <p:nvSpPr>
-          <p:cNvPr id="4" name="TextBox 3"/>
+              <a:t>Name the model you optimize</a:t>
+            </a:r>
+          </a:p>
+        </p:txBody>
+      </p:sp>
+      <p:sp>
+        <p:nvSpPr>
+          <p:cNvPr id="5" name="TextBox 4"/>
           <p:cNvSpPr txBox="1"/>
           <p:nvPr/>
         </p:nvSpPr>
@@ -4523,6 +4678,535 @@
                 </a:solidFill>
                 <a:latin typeface="Calibri"/>
               </a:rPr>
+              <a:t>Browser lab track</a:t>
+            </a:r>
+          </a:p>
+        </p:txBody>
+      </p:sp>
+      <p:sp>
+        <p:nvSpPr>
+          <p:cNvPr id="3" name="TextBox 2"/>
+          <p:cNvSpPr txBox="1"/>
+          <p:nvPr/>
+        </p:nvSpPr>
+        <p:spPr>
+          <a:xfrm>
+            <a:off x="548640" y="1234440"/>
+            <a:ext cx="11064240" cy="4937760"/>
+          </a:xfrm>
+          <a:prstGeom prst="rect">
+            <a:avLst/>
+          </a:prstGeom>
+          <a:noFill/>
+        </p:spPr>
+        <p:txBody>
+          <a:bodyPr wrap="square">
+            <a:noAutofit/>
+          </a:bodyPr>
+          <a:lstStyle/>
+          <a:p>
+            <a:pPr lvl="0" marL="457200" indent="-228600">
+              <a:buFont typeface="Calibri"/>
+              <a:spcAft>
+                <a:spcPts val="1000"/>
+              </a:spcAft>
+              <a:buSzPct val="100000"/>
+              <a:buChar char="•"/>
+              <a:lnSpc>
+                <a:spcPts val="2200"/>
+              </a:lnSpc>
+            </a:pPr>
+            <a:r>
+              <a:rPr sz="2000" b="0">
+                <a:solidFill>
+                  <a:srgbClr val="333333"/>
+                </a:solidFill>
+                <a:latin typeface="Calibri"/>
+              </a:rPr>
+              <a:t>In the browser lab track, open the </a:t>
+            </a:r>
+            <a:r>
+              <a:rPr sz="2000" b="1">
+                <a:solidFill>
+                  <a:srgbClr val="333333"/>
+                </a:solidFill>
+                <a:latin typeface="Calibri"/>
+              </a:rPr>
+              <a:t>net-models</a:t>
+            </a:r>
+            <a:r>
+              <a:rPr sz="2000" b="0">
+                <a:solidFill>
+                  <a:srgbClr val="333333"/>
+                </a:solidFill>
+                <a:latin typeface="Calibri"/>
+              </a:rPr>
+              <a:t> lab from the tools shelf</a:t>
+            </a:r>
+          </a:p>
+          <a:p>
+            <a:pPr lvl="0" marL="457200" indent="-228600">
+              <a:buFont typeface="Calibri"/>
+              <a:spcAft>
+                <a:spcPts val="1000"/>
+              </a:spcAft>
+              <a:buSzPct val="100000"/>
+              <a:buChar char="•"/>
+              <a:lnSpc>
+                <a:spcPts val="2200"/>
+              </a:lnSpc>
+            </a:pPr>
+            <a:r>
+              <a:rPr sz="2000" b="0">
+                <a:solidFill>
+                  <a:srgbClr val="333333"/>
+                </a:solidFill>
+                <a:latin typeface="Calibri"/>
+              </a:rPr>
+              <a:t>Load the starter placement, run the algorithm once</a:t>
+            </a:r>
+          </a:p>
+          <a:p>
+            <a:pPr lvl="0" marL="457200" indent="-228600">
+              <a:buFont typeface="Calibri"/>
+              <a:spcAft>
+                <a:spcPts val="1000"/>
+              </a:spcAft>
+              <a:buSzPct val="100000"/>
+              <a:buChar char="•"/>
+              <a:lnSpc>
+                <a:spcPts val="2200"/>
+              </a:lnSpc>
+            </a:pPr>
+            <a:r>
+              <a:rPr sz="2000" b="0">
+                <a:solidFill>
+                  <a:srgbClr val="333333"/>
+                </a:solidFill>
+                <a:latin typeface="Calibri"/>
+              </a:rPr>
+              <a:t>Work the challenges that lock the goldens</a:t>
+            </a:r>
+          </a:p>
+        </p:txBody>
+      </p:sp>
+      <p:sp>
+        <p:nvSpPr>
+          <p:cNvPr id="4" name="TextBox 3"/>
+          <p:cNvSpPr txBox="1"/>
+          <p:nvPr/>
+        </p:nvSpPr>
+        <p:spPr>
+          <a:xfrm>
+            <a:off x="548640" y="6355080"/>
+            <a:ext cx="11064240" cy="320040"/>
+          </a:xfrm>
+          <a:prstGeom prst="rect">
+            <a:avLst/>
+          </a:prstGeom>
+          <a:noFill/>
+        </p:spPr>
+        <p:txBody>
+          <a:bodyPr wrap="square">
+            <a:noAutofit/>
+          </a:bodyPr>
+          <a:lstStyle/>
+          <a:p>
+            <a:pPr algn="r">
+              <a:lnSpc>
+                <a:spcPts val="2200"/>
+              </a:lnSpc>
+              <a:defRPr sz="1000" b="0">
+                <a:solidFill>
+                  <a:srgbClr val="666666"/>
+                </a:solidFill>
+                <a:latin typeface="Calibri"/>
+              </a:defRPr>
+            </a:pPr>
+            <a:r>
+              <a:t>learn_placement — 03 net models</a:t>
+            </a:r>
+          </a:p>
+        </p:txBody>
+      </p:sp>
+    </p:spTree>
+  </p:cSld>
+  <p:clrMapOvr>
+    <a:masterClrMapping/>
+  </p:clrMapOvr>
+</p:sld>
+</file>
+
+<file path=ppt/slides/slide12.xml><?xml version="1.0" encoding="utf-8"?>
+<p:sld xmlns:a="http://schemas.openxmlformats.org/drawingml/2006/main" xmlns:p="http://schemas.openxmlformats.org/presentationml/2006/main" xmlns:r="http://schemas.openxmlformats.org/officeDocument/2006/relationships">
+  <p:cSld>
+    <p:spTree>
+      <p:nvGrpSpPr>
+        <p:cNvPr id="1" name=""/>
+        <p:cNvGrpSpPr/>
+        <p:nvPr/>
+      </p:nvGrpSpPr>
+      <p:grpSpPr/>
+      <p:sp>
+        <p:nvSpPr>
+          <p:cNvPr id="2" name="TextBox 1"/>
+          <p:cNvSpPr txBox="1"/>
+          <p:nvPr/>
+        </p:nvSpPr>
+        <p:spPr>
+          <a:xfrm>
+            <a:off x="548640" y="411480"/>
+            <a:ext cx="11064240" cy="777240"/>
+          </a:xfrm>
+          <a:prstGeom prst="rect">
+            <a:avLst/>
+          </a:prstGeom>
+          <a:noFill/>
+        </p:spPr>
+        <p:txBody>
+          <a:bodyPr wrap="square">
+            <a:noAutofit/>
+          </a:bodyPr>
+          <a:lstStyle/>
+          <a:p>
+            <a:pPr>
+              <a:lnSpc>
+                <a:spcPts val="2200"/>
+              </a:lnSpc>
+            </a:pPr>
+            <a:r>
+              <a:rPr sz="2800" b="1">
+                <a:solidFill>
+                  <a:srgbClr val="1A1A2E"/>
+                </a:solidFill>
+                <a:latin typeface="Calibri"/>
+              </a:rPr>
+              <a:t>Implement track</a:t>
+            </a:r>
+          </a:p>
+        </p:txBody>
+      </p:sp>
+      <p:sp>
+        <p:nvSpPr>
+          <p:cNvPr id="3" name="TextBox 2"/>
+          <p:cNvSpPr txBox="1"/>
+          <p:nvPr/>
+        </p:nvSpPr>
+        <p:spPr>
+          <a:xfrm>
+            <a:off x="548640" y="1234440"/>
+            <a:ext cx="11064240" cy="4937760"/>
+          </a:xfrm>
+          <a:prstGeom prst="rect">
+            <a:avLst/>
+          </a:prstGeom>
+          <a:noFill/>
+        </p:spPr>
+        <p:txBody>
+          <a:bodyPr wrap="square">
+            <a:noAutofit/>
+          </a:bodyPr>
+          <a:lstStyle/>
+          <a:p>
+            <a:pPr lvl="0" marL="457200" indent="-228600">
+              <a:buFont typeface="Calibri"/>
+              <a:spcAft>
+                <a:spcPts val="1000"/>
+              </a:spcAft>
+              <a:buSzPct val="100000"/>
+              <a:buChar char="•"/>
+              <a:lnSpc>
+                <a:spcPts val="2200"/>
+              </a:lnSpc>
+            </a:pPr>
+            <a:r>
+              <a:rPr sz="2000" b="0">
+                <a:solidFill>
+                  <a:srgbClr val="333333"/>
+                </a:solidFill>
+                <a:latin typeface="Calibri"/>
+              </a:rPr>
+              <a:t>In the implement track</a:t>
+            </a:r>
+          </a:p>
+          <a:p>
+            <a:pPr lvl="0" marL="457200" indent="-228600">
+              <a:buFont typeface="Calibri"/>
+              <a:spcAft>
+                <a:spcPts val="1000"/>
+              </a:spcAft>
+              <a:buSzPct val="100000"/>
+              <a:buChar char="•"/>
+              <a:lnSpc>
+                <a:spcPts val="2200"/>
+              </a:lnSpc>
+            </a:pPr>
+            <a:r>
+              <a:rPr sz="2000" b="0">
+                <a:solidFill>
+                  <a:srgbClr val="333333"/>
+                </a:solidFill>
+                <a:latin typeface="Calibri"/>
+              </a:rPr>
+              <a:t>Parse `tiny_place.json`, run the algorithm with a deterministic seed</a:t>
+            </a:r>
+          </a:p>
+          <a:p>
+            <a:pPr lvl="0" marL="457200" indent="-228600">
+              <a:buFont typeface="Calibri"/>
+              <a:spcAft>
+                <a:spcPts val="1000"/>
+              </a:spcAft>
+              <a:buSzPct val="100000"/>
+              <a:buChar char="•"/>
+              <a:lnSpc>
+                <a:spcPts val="2200"/>
+              </a:lnSpc>
+            </a:pPr>
+            <a:r>
+              <a:rPr sz="2000" b="0">
+                <a:solidFill>
+                  <a:srgbClr val="333333"/>
+                </a:solidFill>
+                <a:latin typeface="Calibri"/>
+              </a:rPr>
+              <a:t>Match the browser goldens before you claim the checklist</a:t>
+            </a:r>
+          </a:p>
+        </p:txBody>
+      </p:sp>
+      <p:sp>
+        <p:nvSpPr>
+          <p:cNvPr id="4" name="TextBox 3"/>
+          <p:cNvSpPr txBox="1"/>
+          <p:nvPr/>
+        </p:nvSpPr>
+        <p:spPr>
+          <a:xfrm>
+            <a:off x="548640" y="6355080"/>
+            <a:ext cx="11064240" cy="320040"/>
+          </a:xfrm>
+          <a:prstGeom prst="rect">
+            <a:avLst/>
+          </a:prstGeom>
+          <a:noFill/>
+        </p:spPr>
+        <p:txBody>
+          <a:bodyPr wrap="square">
+            <a:noAutofit/>
+          </a:bodyPr>
+          <a:lstStyle/>
+          <a:p>
+            <a:pPr algn="r">
+              <a:lnSpc>
+                <a:spcPts val="2200"/>
+              </a:lnSpc>
+              <a:defRPr sz="1000" b="0">
+                <a:solidFill>
+                  <a:srgbClr val="666666"/>
+                </a:solidFill>
+                <a:latin typeface="Calibri"/>
+              </a:defRPr>
+            </a:pPr>
+            <a:r>
+              <a:t>learn_placement — 03 net models</a:t>
+            </a:r>
+          </a:p>
+        </p:txBody>
+      </p:sp>
+    </p:spTree>
+  </p:cSld>
+  <p:clrMapOvr>
+    <a:masterClrMapping/>
+  </p:clrMapOvr>
+</p:sld>
+</file>
+
+<file path=ppt/slides/slide13.xml><?xml version="1.0" encoding="utf-8"?>
+<p:sld xmlns:a="http://schemas.openxmlformats.org/drawingml/2006/main" xmlns:p="http://schemas.openxmlformats.org/presentationml/2006/main" xmlns:r="http://schemas.openxmlformats.org/officeDocument/2006/relationships">
+  <p:cSld>
+    <p:spTree>
+      <p:nvGrpSpPr>
+        <p:cNvPr id="1" name=""/>
+        <p:cNvGrpSpPr/>
+        <p:nvPr/>
+      </p:nvGrpSpPr>
+      <p:grpSpPr/>
+      <p:sp>
+        <p:nvSpPr>
+          <p:cNvPr id="2" name="TextBox 1"/>
+          <p:cNvSpPr txBox="1"/>
+          <p:nvPr/>
+        </p:nvSpPr>
+        <p:spPr>
+          <a:xfrm>
+            <a:off x="548640" y="411480"/>
+            <a:ext cx="11064240" cy="777240"/>
+          </a:xfrm>
+          <a:prstGeom prst="rect">
+            <a:avLst/>
+          </a:prstGeom>
+          <a:noFill/>
+        </p:spPr>
+        <p:txBody>
+          <a:bodyPr wrap="square">
+            <a:noAutofit/>
+          </a:bodyPr>
+          <a:lstStyle/>
+          <a:p>
+            <a:pPr>
+              <a:lnSpc>
+                <a:spcPts val="2200"/>
+              </a:lnSpc>
+            </a:pPr>
+            <a:r>
+              <a:rPr sz="2800" b="1">
+                <a:solidFill>
+                  <a:srgbClr val="1A1A2E"/>
+                </a:solidFill>
+                <a:latin typeface="Calibri"/>
+              </a:rPr>
+              <a:t>Pitfalls</a:t>
+            </a:r>
+          </a:p>
+        </p:txBody>
+      </p:sp>
+      <p:sp>
+        <p:nvSpPr>
+          <p:cNvPr id="3" name="TextBox 2"/>
+          <p:cNvSpPr txBox="1"/>
+          <p:nvPr/>
+        </p:nvSpPr>
+        <p:spPr>
+          <a:xfrm>
+            <a:off x="548640" y="1234440"/>
+            <a:ext cx="11064240" cy="4937760"/>
+          </a:xfrm>
+          <a:prstGeom prst="rect">
+            <a:avLst/>
+          </a:prstGeom>
+          <a:noFill/>
+        </p:spPr>
+        <p:txBody>
+          <a:bodyPr wrap="square">
+            <a:noAutofit/>
+          </a:bodyPr>
+          <a:lstStyle/>
+          <a:p>
+            <a:pPr lvl="0" marL="457200" indent="-228600">
+              <a:buFont typeface="Calibri"/>
+              <a:spcAft>
+                <a:spcPts val="1000"/>
+              </a:spcAft>
+              <a:buSzPct val="100000"/>
+              <a:buChar char="•"/>
+              <a:lnSpc>
+                <a:spcPts val="2200"/>
+              </a:lnSpc>
+            </a:pPr>
+            <a:r>
+              <a:rPr sz="2000" b="0">
+                <a:solidFill>
+                  <a:srgbClr val="333333"/>
+                </a:solidFill>
+                <a:latin typeface="Calibri"/>
+              </a:rPr>
+              <a:t>Common traps</a:t>
+            </a:r>
+          </a:p>
+        </p:txBody>
+      </p:sp>
+      <p:sp>
+        <p:nvSpPr>
+          <p:cNvPr id="4" name="TextBox 3"/>
+          <p:cNvSpPr txBox="1"/>
+          <p:nvPr/>
+        </p:nvSpPr>
+        <p:spPr>
+          <a:xfrm>
+            <a:off x="548640" y="6355080"/>
+            <a:ext cx="11064240" cy="320040"/>
+          </a:xfrm>
+          <a:prstGeom prst="rect">
+            <a:avLst/>
+          </a:prstGeom>
+          <a:noFill/>
+        </p:spPr>
+        <p:txBody>
+          <a:bodyPr wrap="square">
+            <a:noAutofit/>
+          </a:bodyPr>
+          <a:lstStyle/>
+          <a:p>
+            <a:pPr algn="r">
+              <a:lnSpc>
+                <a:spcPts val="2200"/>
+              </a:lnSpc>
+              <a:defRPr sz="1000" b="0">
+                <a:solidFill>
+                  <a:srgbClr val="666666"/>
+                </a:solidFill>
+                <a:latin typeface="Calibri"/>
+              </a:defRPr>
+            </a:pPr>
+            <a:r>
+              <a:t>learn_placement — 03 net models</a:t>
+            </a:r>
+          </a:p>
+        </p:txBody>
+      </p:sp>
+    </p:spTree>
+  </p:cSld>
+  <p:clrMapOvr>
+    <a:masterClrMapping/>
+  </p:clrMapOvr>
+</p:sld>
+</file>
+
+<file path=ppt/slides/slide14.xml><?xml version="1.0" encoding="utf-8"?>
+<p:sld xmlns:a="http://schemas.openxmlformats.org/drawingml/2006/main" xmlns:p="http://schemas.openxmlformats.org/presentationml/2006/main" xmlns:r="http://schemas.openxmlformats.org/officeDocument/2006/relationships">
+  <p:cSld>
+    <p:spTree>
+      <p:nvGrpSpPr>
+        <p:cNvPr id="1" name=""/>
+        <p:cNvGrpSpPr/>
+        <p:nvPr/>
+      </p:nvGrpSpPr>
+      <p:grpSpPr/>
+      <p:sp>
+        <p:nvSpPr>
+          <p:cNvPr id="2" name="TextBox 1"/>
+          <p:cNvSpPr txBox="1"/>
+          <p:nvPr/>
+        </p:nvSpPr>
+        <p:spPr>
+          <a:xfrm>
+            <a:off x="548640" y="411480"/>
+            <a:ext cx="11064240" cy="777240"/>
+          </a:xfrm>
+          <a:prstGeom prst="rect">
+            <a:avLst/>
+          </a:prstGeom>
+          <a:noFill/>
+        </p:spPr>
+        <p:txBody>
+          <a:bodyPr wrap="square">
+            <a:noAutofit/>
+          </a:bodyPr>
+          <a:lstStyle/>
+          <a:p>
+            <a:pPr>
+              <a:lnSpc>
+                <a:spcPts val="2200"/>
+              </a:lnSpc>
+            </a:pPr>
+            <a:r>
+              <a:rPr sz="2800" b="1">
+                <a:solidFill>
+                  <a:srgbClr val="1A1A2E"/>
+                </a:solidFill>
+                <a:latin typeface="Calibri"/>
+              </a:rPr>
               <a:t>Your turn</a:t>
             </a:r>
           </a:p>
@@ -4822,6 +5506,125 @@
               <a:t>Use one model for the reported objective and say which</a:t>
             </a:r>
           </a:p>
+        </p:txBody>
+      </p:sp>
+      <p:sp>
+        <p:nvSpPr>
+          <p:cNvPr id="4" name="TextBox 3"/>
+          <p:cNvSpPr txBox="1"/>
+          <p:nvPr/>
+        </p:nvSpPr>
+        <p:spPr>
+          <a:xfrm>
+            <a:off x="548640" y="6355080"/>
+            <a:ext cx="11064240" cy="320040"/>
+          </a:xfrm>
+          <a:prstGeom prst="rect">
+            <a:avLst/>
+          </a:prstGeom>
+          <a:noFill/>
+        </p:spPr>
+        <p:txBody>
+          <a:bodyPr wrap="square">
+            <a:noAutofit/>
+          </a:bodyPr>
+          <a:lstStyle/>
+          <a:p>
+            <a:pPr algn="r">
+              <a:lnSpc>
+                <a:spcPts val="2200"/>
+              </a:lnSpc>
+              <a:defRPr sz="1000" b="0">
+                <a:solidFill>
+                  <a:srgbClr val="666666"/>
+                </a:solidFill>
+                <a:latin typeface="Calibri"/>
+              </a:defRPr>
+            </a:pPr>
+            <a:r>
+              <a:t>learn_placement — 03 net models</a:t>
+            </a:r>
+          </a:p>
+        </p:txBody>
+      </p:sp>
+    </p:spTree>
+  </p:cSld>
+  <p:clrMapOvr>
+    <a:masterClrMapping/>
+  </p:clrMapOvr>
+</p:sld>
+</file>
+
+<file path=ppt/slides/slide3.xml><?xml version="1.0" encoding="utf-8"?>
+<p:sld xmlns:a="http://schemas.openxmlformats.org/drawingml/2006/main" xmlns:p="http://schemas.openxmlformats.org/presentationml/2006/main" xmlns:r="http://schemas.openxmlformats.org/officeDocument/2006/relationships">
+  <p:cSld>
+    <p:spTree>
+      <p:nvGrpSpPr>
+        <p:cNvPr id="1" name=""/>
+        <p:cNvGrpSpPr/>
+        <p:nvPr/>
+      </p:nvGrpSpPr>
+      <p:grpSpPr/>
+      <p:sp>
+        <p:nvSpPr>
+          <p:cNvPr id="2" name="TextBox 1"/>
+          <p:cNvSpPr txBox="1"/>
+          <p:nvPr/>
+        </p:nvSpPr>
+        <p:spPr>
+          <a:xfrm>
+            <a:off x="548640" y="411480"/>
+            <a:ext cx="11064240" cy="777240"/>
+          </a:xfrm>
+          <a:prstGeom prst="rect">
+            <a:avLst/>
+          </a:prstGeom>
+          <a:noFill/>
+        </p:spPr>
+        <p:txBody>
+          <a:bodyPr wrap="square">
+            <a:noAutofit/>
+          </a:bodyPr>
+          <a:lstStyle/>
+          <a:p>
+            <a:pPr>
+              <a:lnSpc>
+                <a:spcPts val="2200"/>
+              </a:lnSpc>
+            </a:pPr>
+            <a:r>
+              <a:rPr sz="2800" b="1">
+                <a:solidFill>
+                  <a:srgbClr val="1A1A2E"/>
+                </a:solidFill>
+                <a:latin typeface="Calibri"/>
+              </a:rPr>
+              <a:t>Pseudocode</a:t>
+            </a:r>
+          </a:p>
+        </p:txBody>
+      </p:sp>
+      <p:sp>
+        <p:nvSpPr>
+          <p:cNvPr id="3" name="TextBox 2"/>
+          <p:cNvSpPr txBox="1"/>
+          <p:nvPr/>
+        </p:nvSpPr>
+        <p:spPr>
+          <a:xfrm>
+            <a:off x="548640" y="1234440"/>
+            <a:ext cx="11064240" cy="4937760"/>
+          </a:xfrm>
+          <a:prstGeom prst="rect">
+            <a:avLst/>
+          </a:prstGeom>
+          <a:noFill/>
+        </p:spPr>
+        <p:txBody>
+          <a:bodyPr wrap="square">
+            <a:noAutofit/>
+          </a:bodyPr>
+          <a:lstStyle/>
           <a:p>
             <a:pPr lvl="0" marL="457200" indent="-228600">
               <a:buFont typeface="Calibri"/>
@@ -4841,7 +5644,73 @@
                 </a:solidFill>
                 <a:latin typeface="Calibri"/>
               </a:rPr>
-              <a:t>&lt;!-- algorithm-walkthrough --&gt;</a:t>
+              <a:t>Net models change which edges enter the sum</a:t>
+            </a:r>
+          </a:p>
+          <a:p>
+            <a:pPr lvl="0" marL="457200" indent="-228600">
+              <a:buFont typeface="Calibri"/>
+              <a:spcAft>
+                <a:spcPts val="1000"/>
+              </a:spcAft>
+              <a:buSzPct val="100000"/>
+              <a:buChar char="•"/>
+              <a:lnSpc>
+                <a:spcPts val="2200"/>
+              </a:lnSpc>
+            </a:pPr>
+            <a:r>
+              <a:rPr sz="2000" b="0">
+                <a:solidFill>
+                  <a:srgbClr val="333333"/>
+                </a:solidFill>
+                <a:latin typeface="Calibri"/>
+              </a:rPr>
+              <a:t>Pseudocode names bbox, clique, and star so reports stay comparable</a:t>
+            </a:r>
+          </a:p>
+          <a:p>
+            <a:pPr lvl="0" marL="457200" indent="-228600">
+              <a:buFont typeface="Calibri"/>
+              <a:spcAft>
+                <a:spcPts val="1000"/>
+              </a:spcAft>
+              <a:buSzPct val="100000"/>
+              <a:buChar char="•"/>
+              <a:lnSpc>
+                <a:spcPts val="2200"/>
+              </a:lnSpc>
+            </a:pPr>
+            <a:r>
+              <a:rPr sz="2000" b="0">
+                <a:solidFill>
+                  <a:srgbClr val="333333"/>
+                </a:solidFill>
+                <a:latin typeface="Calibri"/>
+              </a:rPr>
+              <a:t>Open this module's examples file and find the Pseudocode section</a:t>
+            </a:r>
+          </a:p>
+          <a:p>
+            <a:pPr lvl="0" marL="457200" indent="-228600">
+              <a:buFont typeface="Calibri"/>
+              <a:spcAft>
+                <a:spcPts val="1000"/>
+              </a:spcAft>
+              <a:buSzPct val="100000"/>
+              <a:buChar char="•"/>
+              <a:lnSpc>
+                <a:spcPts val="2200"/>
+              </a:lnSpc>
+            </a:pPr>
+            <a:r>
+              <a:rPr sz="2000" b="0">
+                <a:solidFill>
+                  <a:srgbClr val="333333"/>
+                </a:solidFill>
+                <a:latin typeface="Calibri"/>
+              </a:rPr>
+              <a:t>That written sketch is what you implement on the implement track and what the browser</a:t>
             </a:r>
           </a:p>
         </p:txBody>
@@ -4893,7 +5762,405 @@
 </p:sld>
 </file>
 
-<file path=ppt/slides/slide3.xml><?xml version="1.0" encoding="utf-8"?>
+<file path=ppt/slides/slide4.xml><?xml version="1.0" encoding="utf-8"?>
+<p:sld xmlns:a="http://schemas.openxmlformats.org/drawingml/2006/main" xmlns:p="http://schemas.openxmlformats.org/presentationml/2006/main" xmlns:r="http://schemas.openxmlformats.org/officeDocument/2006/relationships">
+  <p:cSld>
+    <p:spTree>
+      <p:nvGrpSpPr>
+        <p:cNvPr id="1" name=""/>
+        <p:cNvGrpSpPr/>
+        <p:nvPr/>
+      </p:nvGrpSpPr>
+      <p:grpSpPr/>
+      <p:sp>
+        <p:nvSpPr>
+          <p:cNvPr id="2" name="TextBox 1"/>
+          <p:cNvSpPr txBox="1"/>
+          <p:nvPr/>
+        </p:nvSpPr>
+        <p:spPr>
+          <a:xfrm>
+            <a:off x="548640" y="411480"/>
+            <a:ext cx="11064240" cy="777240"/>
+          </a:xfrm>
+          <a:prstGeom prst="rect">
+            <a:avLst/>
+          </a:prstGeom>
+          <a:noFill/>
+        </p:spPr>
+        <p:txBody>
+          <a:bodyPr wrap="square">
+            <a:noAutofit/>
+          </a:bodyPr>
+          <a:lstStyle/>
+          <a:p>
+            <a:pPr>
+              <a:lnSpc>
+                <a:spcPts val="2200"/>
+              </a:lnSpc>
+            </a:pPr>
+            <a:r>
+              <a:rPr sz="2800" b="1">
+                <a:solidFill>
+                  <a:srgbClr val="1A1A2E"/>
+                </a:solidFill>
+                <a:latin typeface="Calibri"/>
+              </a:rPr>
+              <a:t>Algorithm sketch</a:t>
+            </a:r>
+          </a:p>
+        </p:txBody>
+      </p:sp>
+      <p:sp>
+        <p:nvSpPr>
+          <p:cNvPr id="3" name="TextBox 2"/>
+          <p:cNvSpPr txBox="1"/>
+          <p:nvPr/>
+        </p:nvSpPr>
+        <p:spPr>
+          <a:xfrm>
+            <a:off x="548640" y="1234440"/>
+            <a:ext cx="11064240" cy="4937760"/>
+          </a:xfrm>
+          <a:prstGeom prst="rect">
+            <a:avLst/>
+          </a:prstGeom>
+          <a:noFill/>
+        </p:spPr>
+        <p:txBody>
+          <a:bodyPr wrap="square">
+            <a:noAutofit/>
+          </a:bodyPr>
+          <a:lstStyle/>
+          <a:p>
+            <a:pPr lvl="0" marL="457200" indent="-228600">
+              <a:buFont typeface="Calibri"/>
+              <a:spcAft>
+                <a:spcPts val="1000"/>
+              </a:spcAft>
+              <a:buSzPct val="100000"/>
+              <a:buChar char="•"/>
+              <a:lnSpc>
+                <a:spcPts val="2200"/>
+              </a:lnSpc>
+            </a:pPr>
+            <a:r>
+              <a:rPr sz="2000" b="0">
+                <a:solidFill>
+                  <a:srgbClr val="333333"/>
+                </a:solidFill>
+                <a:latin typeface="Calibri"/>
+              </a:rPr>
+              <a:t>On golden ABCD, clique HPWL is sixteen and star from A is eight</a:t>
+            </a:r>
+          </a:p>
+          <a:p>
+            <a:pPr lvl="0" marL="457200" indent="-228600">
+              <a:buFont typeface="Calibri"/>
+              <a:spcAft>
+                <a:spcPts val="1000"/>
+              </a:spcAft>
+              <a:buSzPct val="100000"/>
+              <a:buChar char="•"/>
+              <a:lnSpc>
+                <a:spcPts val="2200"/>
+              </a:lnSpc>
+            </a:pPr>
+            <a:r>
+              <a:rPr sz="2000" b="0">
+                <a:solidFill>
+                  <a:srgbClr val="333333"/>
+                </a:solidFill>
+                <a:latin typeface="Calibri"/>
+              </a:rPr>
+              <a:t>Mixing models in one table is a metric bug</a:t>
+            </a:r>
+          </a:p>
+        </p:txBody>
+      </p:sp>
+      <p:sp>
+        <p:nvSpPr>
+          <p:cNvPr id="4" name="TextBox 3"/>
+          <p:cNvSpPr txBox="1"/>
+          <p:nvPr/>
+        </p:nvSpPr>
+        <p:spPr>
+          <a:xfrm>
+            <a:off x="548640" y="6355080"/>
+            <a:ext cx="11064240" cy="320040"/>
+          </a:xfrm>
+          <a:prstGeom prst="rect">
+            <a:avLst/>
+          </a:prstGeom>
+          <a:noFill/>
+        </p:spPr>
+        <p:txBody>
+          <a:bodyPr wrap="square">
+            <a:noAutofit/>
+          </a:bodyPr>
+          <a:lstStyle/>
+          <a:p>
+            <a:pPr algn="r">
+              <a:lnSpc>
+                <a:spcPts val="2200"/>
+              </a:lnSpc>
+              <a:defRPr sz="1000" b="0">
+                <a:solidFill>
+                  <a:srgbClr val="666666"/>
+                </a:solidFill>
+                <a:latin typeface="Calibri"/>
+              </a:defRPr>
+            </a:pPr>
+            <a:r>
+              <a:t>learn_placement — 03 net models</a:t>
+            </a:r>
+          </a:p>
+        </p:txBody>
+      </p:sp>
+    </p:spTree>
+  </p:cSld>
+  <p:clrMapOvr>
+    <a:masterClrMapping/>
+  </p:clrMapOvr>
+</p:sld>
+</file>
+
+<file path=ppt/slides/slide5.xml><?xml version="1.0" encoding="utf-8"?>
+<p:sld xmlns:a="http://schemas.openxmlformats.org/drawingml/2006/main" xmlns:p="http://schemas.openxmlformats.org/presentationml/2006/main" xmlns:r="http://schemas.openxmlformats.org/officeDocument/2006/relationships">
+  <p:cSld>
+    <p:spTree>
+      <p:nvGrpSpPr>
+        <p:cNvPr id="1" name=""/>
+        <p:cNvGrpSpPr/>
+        <p:nvPr/>
+      </p:nvGrpSpPr>
+      <p:grpSpPr/>
+      <p:sp>
+        <p:nvSpPr>
+          <p:cNvPr id="2" name="TextBox 1"/>
+          <p:cNvSpPr txBox="1"/>
+          <p:nvPr/>
+        </p:nvSpPr>
+        <p:spPr>
+          <a:xfrm>
+            <a:off x="548640" y="411480"/>
+            <a:ext cx="11064240" cy="777240"/>
+          </a:xfrm>
+          <a:prstGeom prst="rect">
+            <a:avLst/>
+          </a:prstGeom>
+          <a:noFill/>
+        </p:spPr>
+        <p:txBody>
+          <a:bodyPr wrap="square">
+            <a:noAutofit/>
+          </a:bodyPr>
+          <a:lstStyle/>
+          <a:p>
+            <a:pPr>
+              <a:lnSpc>
+                <a:spcPts val="2200"/>
+              </a:lnSpc>
+            </a:pPr>
+            <a:r>
+              <a:rPr sz="2800" b="1">
+                <a:solidFill>
+                  <a:srgbClr val="1A1A2E"/>
+                </a:solidFill>
+                <a:latin typeface="Calibri"/>
+              </a:rPr>
+              <a:t>Algorithm sketch — try these</a:t>
+            </a:r>
+          </a:p>
+        </p:txBody>
+      </p:sp>
+      <p:sp>
+        <p:nvSpPr>
+          <p:cNvPr id="3" name="TextBox 2"/>
+          <p:cNvSpPr txBox="1"/>
+          <p:nvPr/>
+        </p:nvSpPr>
+        <p:spPr>
+          <a:xfrm>
+            <a:off x="548640" y="1143000"/>
+            <a:ext cx="11064240" cy="5029200"/>
+          </a:xfrm>
+          <a:prstGeom prst="rect">
+            <a:avLst/>
+          </a:prstGeom>
+          <a:solidFill>
+            <a:srgbClr val="F4F4F4"/>
+          </a:solidFill>
+        </p:spPr>
+        <p:txBody>
+          <a:bodyPr wrap="square">
+            <a:noAutofit/>
+          </a:bodyPr>
+          <a:lstStyle/>
+          <a:p>
+            <a:pPr>
+              <a:lnSpc>
+                <a:spcPts val="2200"/>
+              </a:lnSpc>
+              <a:spcAft>
+                <a:spcPts val="400"/>
+              </a:spcAft>
+            </a:pPr>
+            <a:r>
+              <a:rPr sz="2000" b="0">
+                <a:solidFill>
+                  <a:srgbClr val="333333"/>
+                </a:solidFill>
+                <a:latin typeface="Consolas"/>
+              </a:rPr>
+              <a:t>INPUT: net pins, positions, model</a:t>
+            </a:r>
+          </a:p>
+          <a:p>
+            <a:pPr>
+              <a:lnSpc>
+                <a:spcPts val="2200"/>
+              </a:lnSpc>
+              <a:spcAft>
+                <a:spcPts val="400"/>
+              </a:spcAft>
+            </a:pPr>
+            <a:r>
+              <a:rPr sz="2000" b="0">
+                <a:solidFill>
+                  <a:srgbClr val="333333"/>
+                </a:solidFill>
+                <a:latin typeface="Consolas"/>
+              </a:rPr>
+              <a:t>bbox: one HPWL on all pins</a:t>
+            </a:r>
+          </a:p>
+          <a:p>
+            <a:pPr>
+              <a:lnSpc>
+                <a:spcPts val="2200"/>
+              </a:lnSpc>
+              <a:spcAft>
+                <a:spcPts val="400"/>
+              </a:spcAft>
+            </a:pPr>
+            <a:r>
+              <a:rPr sz="2000" b="0">
+                <a:solidFill>
+                  <a:srgbClr val="333333"/>
+                </a:solidFill>
+                <a:latin typeface="Consolas"/>
+              </a:rPr>
+              <a:t>clique: Σ pairwise HPWL over pin pairs</a:t>
+            </a:r>
+          </a:p>
+          <a:p>
+            <a:pPr>
+              <a:lnSpc>
+                <a:spcPts val="2200"/>
+              </a:lnSpc>
+              <a:spcAft>
+                <a:spcPts val="400"/>
+              </a:spcAft>
+            </a:pPr>
+            <a:r>
+              <a:rPr sz="2000" b="0">
+                <a:solidFill>
+                  <a:srgbClr val="333333"/>
+                </a:solidFill>
+                <a:latin typeface="Consolas"/>
+              </a:rPr>
+              <a:t>star: Σ HPWL(hub, other pins)</a:t>
+            </a:r>
+          </a:p>
+          <a:p>
+            <a:pPr>
+              <a:lnSpc>
+                <a:spcPts val="2200"/>
+              </a:lnSpc>
+              <a:spcAft>
+                <a:spcPts val="400"/>
+              </a:spcAft>
+            </a:pPr>
+            <a:r>
+              <a:rPr sz="2000" b="0">
+                <a:solidFill>
+                  <a:srgbClr val="333333"/>
+                </a:solidFill>
+                <a:latin typeface="Consolas"/>
+              </a:rPr>
+              <a:t>GOLDEN 4-pin ABCD on golden place:</a:t>
+            </a:r>
+          </a:p>
+          <a:p>
+            <a:pPr>
+              <a:lnSpc>
+                <a:spcPts val="2200"/>
+              </a:lnSpc>
+              <a:spcAft>
+                <a:spcPts val="400"/>
+              </a:spcAft>
+            </a:pPr>
+            <a:r>
+              <a:rPr sz="2000" b="0">
+                <a:solidFill>
+                  <a:srgbClr val="333333"/>
+                </a:solidFill>
+                <a:latin typeface="Consolas"/>
+              </a:rPr>
+              <a:t>  clique=16; star from A=8</a:t>
+            </a:r>
+          </a:p>
+        </p:txBody>
+      </p:sp>
+      <p:sp>
+        <p:nvSpPr>
+          <p:cNvPr id="4" name="TextBox 3"/>
+          <p:cNvSpPr txBox="1"/>
+          <p:nvPr/>
+        </p:nvSpPr>
+        <p:spPr>
+          <a:xfrm>
+            <a:off x="548640" y="6355080"/>
+            <a:ext cx="11064240" cy="320040"/>
+          </a:xfrm>
+          <a:prstGeom prst="rect">
+            <a:avLst/>
+          </a:prstGeom>
+          <a:noFill/>
+        </p:spPr>
+        <p:txBody>
+          <a:bodyPr wrap="square">
+            <a:noAutofit/>
+          </a:bodyPr>
+          <a:lstStyle/>
+          <a:p>
+            <a:pPr algn="r">
+              <a:lnSpc>
+                <a:spcPts val="2200"/>
+              </a:lnSpc>
+              <a:defRPr sz="1000" b="0">
+                <a:solidFill>
+                  <a:srgbClr val="666666"/>
+                </a:solidFill>
+                <a:latin typeface="Calibri"/>
+              </a:defRPr>
+            </a:pPr>
+            <a:r>
+              <a:t>learn_placement — 03 net models</a:t>
+            </a:r>
+          </a:p>
+        </p:txBody>
+      </p:sp>
+    </p:spTree>
+  </p:cSld>
+  <p:clrMapOvr>
+    <a:masterClrMapping/>
+  </p:clrMapOvr>
+</p:sld>
+</file>
+
+<file path=ppt/slides/slide6.xml><?xml version="1.0" encoding="utf-8"?>
 <p:sld xmlns:a="http://schemas.openxmlformats.org/drawingml/2006/main" xmlns:p="http://schemas.openxmlformats.org/presentationml/2006/main" xmlns:r="http://schemas.openxmlformats.org/officeDocument/2006/relationships">
   <p:cSld>
     <p:spTree>
@@ -5052,7 +6319,7 @@
 </p:sld>
 </file>
 
-<file path=ppt/slides/slide4.xml><?xml version="1.0" encoding="utf-8"?>
+<file path=ppt/slides/slide7.xml><?xml version="1.0" encoding="utf-8"?>
 <p:sld xmlns:a="http://schemas.openxmlformats.org/drawingml/2006/main" xmlns:p="http://schemas.openxmlformats.org/presentationml/2006/main" xmlns:r="http://schemas.openxmlformats.org/officeDocument/2006/relationships">
   <p:cSld>
     <p:spTree>
@@ -5211,7 +6478,7 @@
 </p:sld>
 </file>
 
-<file path=ppt/slides/slide5.xml><?xml version="1.0" encoding="utf-8"?>
+<file path=ppt/slides/slide8.xml><?xml version="1.0" encoding="utf-8"?>
 <p:sld xmlns:a="http://schemas.openxmlformats.org/drawingml/2006/main" xmlns:p="http://schemas.openxmlformats.org/presentationml/2006/main" xmlns:r="http://schemas.openxmlformats.org/officeDocument/2006/relationships">
   <p:cSld>
     <p:spTree>
@@ -5370,7 +6637,7 @@
 </p:sld>
 </file>
 
-<file path=ppt/slides/slide6.xml><?xml version="1.0" encoding="utf-8"?>
+<file path=ppt/slides/slide9.xml><?xml version="1.0" encoding="utf-8"?>
 <p:sld xmlns:a="http://schemas.openxmlformats.org/drawingml/2006/main" xmlns:p="http://schemas.openxmlformats.org/presentationml/2006/main" xmlns:r="http://schemas.openxmlformats.org/officeDocument/2006/relationships">
   <p:cSld>
     <p:spTree>
@@ -5485,553 +6752,6 @@
       <p:sp>
         <p:nvSpPr>
           <p:cNvPr id="5" name="TextBox 4"/>
-          <p:cNvSpPr txBox="1"/>
-          <p:nvPr/>
-        </p:nvSpPr>
-        <p:spPr>
-          <a:xfrm>
-            <a:off x="548640" y="6355080"/>
-            <a:ext cx="11064240" cy="320040"/>
-          </a:xfrm>
-          <a:prstGeom prst="rect">
-            <a:avLst/>
-          </a:prstGeom>
-          <a:noFill/>
-        </p:spPr>
-        <p:txBody>
-          <a:bodyPr wrap="square">
-            <a:noAutofit/>
-          </a:bodyPr>
-          <a:lstStyle/>
-          <a:p>
-            <a:pPr algn="r">
-              <a:lnSpc>
-                <a:spcPts val="2200"/>
-              </a:lnSpc>
-              <a:defRPr sz="1000" b="0">
-                <a:solidFill>
-                  <a:srgbClr val="666666"/>
-                </a:solidFill>
-                <a:latin typeface="Calibri"/>
-              </a:defRPr>
-            </a:pPr>
-            <a:r>
-              <a:t>learn_placement — 03 net models</a:t>
-            </a:r>
-          </a:p>
-        </p:txBody>
-      </p:sp>
-    </p:spTree>
-  </p:cSld>
-  <p:clrMapOvr>
-    <a:masterClrMapping/>
-  </p:clrMapOvr>
-</p:sld>
-</file>
-
-<file path=ppt/slides/slide7.xml><?xml version="1.0" encoding="utf-8"?>
-<p:sld xmlns:a="http://schemas.openxmlformats.org/drawingml/2006/main" xmlns:p="http://schemas.openxmlformats.org/presentationml/2006/main" xmlns:r="http://schemas.openxmlformats.org/officeDocument/2006/relationships">
-  <p:cSld>
-    <p:spTree>
-      <p:nvGrpSpPr>
-        <p:cNvPr id="1" name=""/>
-        <p:cNvGrpSpPr/>
-        <p:nvPr/>
-      </p:nvGrpSpPr>
-      <p:grpSpPr/>
-      <p:sp>
-        <p:nvSpPr>
-          <p:cNvPr id="2" name="TextBox 1"/>
-          <p:cNvSpPr txBox="1"/>
-          <p:nvPr/>
-        </p:nvSpPr>
-        <p:spPr>
-          <a:xfrm>
-            <a:off x="548640" y="411480"/>
-            <a:ext cx="11064240" cy="777240"/>
-          </a:xfrm>
-          <a:prstGeom prst="rect">
-            <a:avLst/>
-          </a:prstGeom>
-          <a:noFill/>
-        </p:spPr>
-        <p:txBody>
-          <a:bodyPr wrap="square">
-            <a:noAutofit/>
-          </a:bodyPr>
-          <a:lstStyle/>
-          <a:p>
-            <a:pPr>
-              <a:lnSpc>
-                <a:spcPts val="2200"/>
-              </a:lnSpc>
-            </a:pPr>
-            <a:r>
-              <a:rPr sz="2800" b="1">
-                <a:solidFill>
-                  <a:srgbClr val="1A1A2E"/>
-                </a:solidFill>
-                <a:latin typeface="Calibri"/>
-              </a:rPr>
-              <a:t>Name the model you optimize</a:t>
-            </a:r>
-          </a:p>
-        </p:txBody>
-      </p:sp>
-      <p:pic>
-        <p:nvPicPr>
-          <p:cNvPr id="3" name="Picture 2" descr="05-takeaway.png"/>
-          <p:cNvPicPr>
-            <a:picLocks noChangeAspect="1"/>
-          </p:cNvPicPr>
-          <p:nvPr/>
-        </p:nvPicPr>
-        <p:blipFill>
-          <a:blip r:embed="rId2"/>
-          <a:stretch>
-            <a:fillRect/>
-          </a:stretch>
-        </p:blipFill>
-        <p:spPr>
-          <a:xfrm>
-            <a:off x="548640" y="1143000"/>
-            <a:ext cx="9404113" cy="4572000"/>
-          </a:xfrm>
-          <a:prstGeom prst="rect">
-            <a:avLst/>
-          </a:prstGeom>
-        </p:spPr>
-      </p:pic>
-      <p:sp>
-        <p:nvSpPr>
-          <p:cNvPr id="4" name="TextBox 3"/>
-          <p:cNvSpPr txBox="1"/>
-          <p:nvPr/>
-        </p:nvSpPr>
-        <p:spPr>
-          <a:xfrm>
-            <a:off x="548640" y="5897880"/>
-            <a:ext cx="11064240" cy="411480"/>
-          </a:xfrm>
-          <a:prstGeom prst="rect">
-            <a:avLst/>
-          </a:prstGeom>
-          <a:noFill/>
-        </p:spPr>
-        <p:txBody>
-          <a:bodyPr wrap="square">
-            <a:noAutofit/>
-          </a:bodyPr>
-          <a:lstStyle/>
-          <a:p>
-            <a:pPr>
-              <a:lnSpc>
-                <a:spcPts val="2200"/>
-              </a:lnSpc>
-            </a:pPr>
-            <a:r>
-              <a:rPr sz="1200" b="0">
-                <a:solidFill>
-                  <a:srgbClr val="333333"/>
-                </a:solidFill>
-                <a:latin typeface="Calibri"/>
-              </a:rPr>
-              <a:t>Name the model you optimize</a:t>
-            </a:r>
-          </a:p>
-        </p:txBody>
-      </p:sp>
-      <p:sp>
-        <p:nvSpPr>
-          <p:cNvPr id="5" name="TextBox 4"/>
-          <p:cNvSpPr txBox="1"/>
-          <p:nvPr/>
-        </p:nvSpPr>
-        <p:spPr>
-          <a:xfrm>
-            <a:off x="548640" y="6355080"/>
-            <a:ext cx="11064240" cy="320040"/>
-          </a:xfrm>
-          <a:prstGeom prst="rect">
-            <a:avLst/>
-          </a:prstGeom>
-          <a:noFill/>
-        </p:spPr>
-        <p:txBody>
-          <a:bodyPr wrap="square">
-            <a:noAutofit/>
-          </a:bodyPr>
-          <a:lstStyle/>
-          <a:p>
-            <a:pPr algn="r">
-              <a:lnSpc>
-                <a:spcPts val="2200"/>
-              </a:lnSpc>
-              <a:defRPr sz="1000" b="0">
-                <a:solidFill>
-                  <a:srgbClr val="666666"/>
-                </a:solidFill>
-                <a:latin typeface="Calibri"/>
-              </a:defRPr>
-            </a:pPr>
-            <a:r>
-              <a:t>learn_placement — 03 net models</a:t>
-            </a:r>
-          </a:p>
-        </p:txBody>
-      </p:sp>
-    </p:spTree>
-  </p:cSld>
-  <p:clrMapOvr>
-    <a:masterClrMapping/>
-  </p:clrMapOvr>
-</p:sld>
-</file>
-
-<file path=ppt/slides/slide8.xml><?xml version="1.0" encoding="utf-8"?>
-<p:sld xmlns:a="http://schemas.openxmlformats.org/drawingml/2006/main" xmlns:p="http://schemas.openxmlformats.org/presentationml/2006/main" xmlns:r="http://schemas.openxmlformats.org/officeDocument/2006/relationships">
-  <p:cSld>
-    <p:spTree>
-      <p:nvGrpSpPr>
-        <p:cNvPr id="1" name=""/>
-        <p:cNvGrpSpPr/>
-        <p:nvPr/>
-      </p:nvGrpSpPr>
-      <p:grpSpPr/>
-      <p:sp>
-        <p:nvSpPr>
-          <p:cNvPr id="2" name="TextBox 1"/>
-          <p:cNvSpPr txBox="1"/>
-          <p:nvPr/>
-        </p:nvSpPr>
-        <p:spPr>
-          <a:xfrm>
-            <a:off x="548640" y="411480"/>
-            <a:ext cx="11064240" cy="777240"/>
-          </a:xfrm>
-          <a:prstGeom prst="rect">
-            <a:avLst/>
-          </a:prstGeom>
-          <a:noFill/>
-        </p:spPr>
-        <p:txBody>
-          <a:bodyPr wrap="square">
-            <a:noAutofit/>
-          </a:bodyPr>
-          <a:lstStyle/>
-          <a:p>
-            <a:pPr>
-              <a:lnSpc>
-                <a:spcPts val="2200"/>
-              </a:lnSpc>
-            </a:pPr>
-            <a:r>
-              <a:rPr sz="2800" b="1">
-                <a:solidFill>
-                  <a:srgbClr val="1A1A2E"/>
-                </a:solidFill>
-                <a:latin typeface="Calibri"/>
-              </a:rPr>
-              <a:t>Browser lab track</a:t>
-            </a:r>
-          </a:p>
-        </p:txBody>
-      </p:sp>
-      <p:sp>
-        <p:nvSpPr>
-          <p:cNvPr id="3" name="TextBox 2"/>
-          <p:cNvSpPr txBox="1"/>
-          <p:nvPr/>
-        </p:nvSpPr>
-        <p:spPr>
-          <a:xfrm>
-            <a:off x="548640" y="1234440"/>
-            <a:ext cx="11064240" cy="4937760"/>
-          </a:xfrm>
-          <a:prstGeom prst="rect">
-            <a:avLst/>
-          </a:prstGeom>
-          <a:noFill/>
-        </p:spPr>
-        <p:txBody>
-          <a:bodyPr wrap="square">
-            <a:noAutofit/>
-          </a:bodyPr>
-          <a:lstStyle/>
-          <a:p>
-            <a:pPr lvl="0" marL="457200" indent="-228600">
-              <a:buFont typeface="Calibri"/>
-              <a:spcAft>
-                <a:spcPts val="1000"/>
-              </a:spcAft>
-              <a:buSzPct val="100000"/>
-              <a:buChar char="•"/>
-              <a:lnSpc>
-                <a:spcPts val="2200"/>
-              </a:lnSpc>
-            </a:pPr>
-            <a:r>
-              <a:rPr sz="2000" b="0">
-                <a:solidFill>
-                  <a:srgbClr val="333333"/>
-                </a:solidFill>
-                <a:latin typeface="Calibri"/>
-              </a:rPr>
-              <a:t>In the browser lab track, open the </a:t>
-            </a:r>
-            <a:r>
-              <a:rPr sz="2000" b="1">
-                <a:solidFill>
-                  <a:srgbClr val="333333"/>
-                </a:solidFill>
-                <a:latin typeface="Calibri"/>
-              </a:rPr>
-              <a:t>net-models</a:t>
-            </a:r>
-            <a:r>
-              <a:rPr sz="2000" b="0">
-                <a:solidFill>
-                  <a:srgbClr val="333333"/>
-                </a:solidFill>
-                <a:latin typeface="Calibri"/>
-              </a:rPr>
-              <a:t> lab from the tools shelf</a:t>
-            </a:r>
-          </a:p>
-          <a:p>
-            <a:pPr lvl="0" marL="457200" indent="-228600">
-              <a:buFont typeface="Calibri"/>
-              <a:spcAft>
-                <a:spcPts val="1000"/>
-              </a:spcAft>
-              <a:buSzPct val="100000"/>
-              <a:buChar char="•"/>
-              <a:lnSpc>
-                <a:spcPts val="2200"/>
-              </a:lnSpc>
-            </a:pPr>
-            <a:r>
-              <a:rPr sz="2000" b="0">
-                <a:solidFill>
-                  <a:srgbClr val="333333"/>
-                </a:solidFill>
-                <a:latin typeface="Calibri"/>
-              </a:rPr>
-              <a:t>Load the starter placement, run the algorithm once</a:t>
-            </a:r>
-          </a:p>
-          <a:p>
-            <a:pPr lvl="0" marL="457200" indent="-228600">
-              <a:buFont typeface="Calibri"/>
-              <a:spcAft>
-                <a:spcPts val="1000"/>
-              </a:spcAft>
-              <a:buSzPct val="100000"/>
-              <a:buChar char="•"/>
-              <a:lnSpc>
-                <a:spcPts val="2200"/>
-              </a:lnSpc>
-            </a:pPr>
-            <a:r>
-              <a:rPr sz="2000" b="0">
-                <a:solidFill>
-                  <a:srgbClr val="333333"/>
-                </a:solidFill>
-                <a:latin typeface="Calibri"/>
-              </a:rPr>
-              <a:t>Work the challenges that lock the goldens</a:t>
-            </a:r>
-          </a:p>
-        </p:txBody>
-      </p:sp>
-      <p:sp>
-        <p:nvSpPr>
-          <p:cNvPr id="4" name="TextBox 3"/>
-          <p:cNvSpPr txBox="1"/>
-          <p:nvPr/>
-        </p:nvSpPr>
-        <p:spPr>
-          <a:xfrm>
-            <a:off x="548640" y="6355080"/>
-            <a:ext cx="11064240" cy="320040"/>
-          </a:xfrm>
-          <a:prstGeom prst="rect">
-            <a:avLst/>
-          </a:prstGeom>
-          <a:noFill/>
-        </p:spPr>
-        <p:txBody>
-          <a:bodyPr wrap="square">
-            <a:noAutofit/>
-          </a:bodyPr>
-          <a:lstStyle/>
-          <a:p>
-            <a:pPr algn="r">
-              <a:lnSpc>
-                <a:spcPts val="2200"/>
-              </a:lnSpc>
-              <a:defRPr sz="1000" b="0">
-                <a:solidFill>
-                  <a:srgbClr val="666666"/>
-                </a:solidFill>
-                <a:latin typeface="Calibri"/>
-              </a:defRPr>
-            </a:pPr>
-            <a:r>
-              <a:t>learn_placement — 03 net models</a:t>
-            </a:r>
-          </a:p>
-        </p:txBody>
-      </p:sp>
-    </p:spTree>
-  </p:cSld>
-  <p:clrMapOvr>
-    <a:masterClrMapping/>
-  </p:clrMapOvr>
-</p:sld>
-</file>
-
-<file path=ppt/slides/slide9.xml><?xml version="1.0" encoding="utf-8"?>
-<p:sld xmlns:a="http://schemas.openxmlformats.org/drawingml/2006/main" xmlns:p="http://schemas.openxmlformats.org/presentationml/2006/main" xmlns:r="http://schemas.openxmlformats.org/officeDocument/2006/relationships">
-  <p:cSld>
-    <p:spTree>
-      <p:nvGrpSpPr>
-        <p:cNvPr id="1" name=""/>
-        <p:cNvGrpSpPr/>
-        <p:nvPr/>
-      </p:nvGrpSpPr>
-      <p:grpSpPr/>
-      <p:sp>
-        <p:nvSpPr>
-          <p:cNvPr id="2" name="TextBox 1"/>
-          <p:cNvSpPr txBox="1"/>
-          <p:nvPr/>
-        </p:nvSpPr>
-        <p:spPr>
-          <a:xfrm>
-            <a:off x="548640" y="411480"/>
-            <a:ext cx="11064240" cy="777240"/>
-          </a:xfrm>
-          <a:prstGeom prst="rect">
-            <a:avLst/>
-          </a:prstGeom>
-          <a:noFill/>
-        </p:spPr>
-        <p:txBody>
-          <a:bodyPr wrap="square">
-            <a:noAutofit/>
-          </a:bodyPr>
-          <a:lstStyle/>
-          <a:p>
-            <a:pPr>
-              <a:lnSpc>
-                <a:spcPts val="2200"/>
-              </a:lnSpc>
-            </a:pPr>
-            <a:r>
-              <a:rPr sz="2800" b="1">
-                <a:solidFill>
-                  <a:srgbClr val="1A1A2E"/>
-                </a:solidFill>
-                <a:latin typeface="Calibri"/>
-              </a:rPr>
-              <a:t>Implement track</a:t>
-            </a:r>
-          </a:p>
-        </p:txBody>
-      </p:sp>
-      <p:sp>
-        <p:nvSpPr>
-          <p:cNvPr id="3" name="TextBox 2"/>
-          <p:cNvSpPr txBox="1"/>
-          <p:nvPr/>
-        </p:nvSpPr>
-        <p:spPr>
-          <a:xfrm>
-            <a:off x="548640" y="1234440"/>
-            <a:ext cx="11064240" cy="4937760"/>
-          </a:xfrm>
-          <a:prstGeom prst="rect">
-            <a:avLst/>
-          </a:prstGeom>
-          <a:noFill/>
-        </p:spPr>
-        <p:txBody>
-          <a:bodyPr wrap="square">
-            <a:noAutofit/>
-          </a:bodyPr>
-          <a:lstStyle/>
-          <a:p>
-            <a:pPr lvl="0" marL="457200" indent="-228600">
-              <a:buFont typeface="Calibri"/>
-              <a:spcAft>
-                <a:spcPts val="1000"/>
-              </a:spcAft>
-              <a:buSzPct val="100000"/>
-              <a:buChar char="•"/>
-              <a:lnSpc>
-                <a:spcPts val="2200"/>
-              </a:lnSpc>
-            </a:pPr>
-            <a:r>
-              <a:rPr sz="2000" b="0">
-                <a:solidFill>
-                  <a:srgbClr val="333333"/>
-                </a:solidFill>
-                <a:latin typeface="Calibri"/>
-              </a:rPr>
-              <a:t>In the implement track, open this module’s examples and the course `common/` solvers</a:t>
-            </a:r>
-          </a:p>
-          <a:p>
-            <a:pPr lvl="0" marL="457200" indent="-228600">
-              <a:buFont typeface="Calibri"/>
-              <a:spcAft>
-                <a:spcPts val="1000"/>
-              </a:spcAft>
-              <a:buSzPct val="100000"/>
-              <a:buChar char="•"/>
-              <a:lnSpc>
-                <a:spcPts val="2200"/>
-              </a:lnSpc>
-            </a:pPr>
-            <a:r>
-              <a:rPr sz="2000" b="0">
-                <a:solidFill>
-                  <a:srgbClr val="333333"/>
-                </a:solidFill>
-                <a:latin typeface="Calibri"/>
-              </a:rPr>
-              <a:t>Parse `tiny_place.json`, run the algorithm with a deterministic seed</a:t>
-            </a:r>
-          </a:p>
-          <a:p>
-            <a:pPr lvl="0" marL="457200" indent="-228600">
-              <a:buFont typeface="Calibri"/>
-              <a:spcAft>
-                <a:spcPts val="1000"/>
-              </a:spcAft>
-              <a:buSzPct val="100000"/>
-              <a:buChar char="•"/>
-              <a:lnSpc>
-                <a:spcPts val="2200"/>
-              </a:lnSpc>
-            </a:pPr>
-            <a:r>
-              <a:rPr sz="2000" b="0">
-                <a:solidFill>
-                  <a:srgbClr val="333333"/>
-                </a:solidFill>
-                <a:latin typeface="Calibri"/>
-              </a:rPr>
-              <a:t>Match the browser goldens before you claim the checklist</a:t>
-            </a:r>
-          </a:p>
-        </p:txBody>
-      </p:sp>
-      <p:sp>
-        <p:nvSpPr>
-          <p:cNvPr id="4" name="TextBox 3"/>
           <p:cNvSpPr txBox="1"/>
           <p:nvPr/>
         </p:nvSpPr>
